--- a/task_4/gtf_files/CH4_C2H4_FUG_Key_Results.pptx
+++ b/task_4/gtf_files/CH4_C2H4_FUG_Key_Results.pptx
@@ -2081,7 +2081,7 @@
                           <a:ea typeface="Arial" pitchFamily="34" charset="-122"/>
                           <a:cs typeface="Arial" pitchFamily="34" charset="-120"/>
                         </a:rPr>
-                        <a:t>alpha(CH4/C2H4) = 1.85</a:t>
+                        <a:t>alpha_top = 2.500; alpha_bottom = 1.369; alpha_eff = 1.850</a:t>
                       </a:r>
                       <a:endParaRPr lang="en-US" sz="1100" dirty="0">
                         <a:latin typeface="Arial" charset="0"/>
@@ -3378,7 +3378,7 @@
                 <a:ea typeface="Arial" pitchFamily="34" charset="-122"/>
                 <a:cs typeface="Arial" pitchFamily="34" charset="-120"/>
               </a:rPr>
-              <a:t> Solves the root between alpha_HK = 1.000 and alpha_LK = 1.85, then computes Rmin.</a:t>
+              <a:t> Solves the root between alpha_HK = 1.000 and the effective alpha_LK (Section 1 geometric mean), then computes Rmin.</a:t>
             </a:r>
             <a:endParaRPr lang="en-US" sz="1400" dirty="0"/>
           </a:p>
@@ -3901,7 +3901,7 @@
                 <a:ea typeface="Arial" pitchFamily="34" charset="-122"/>
                 <a:cs typeface="Arial" pitchFamily="34" charset="-120"/>
               </a:rPr>
-              <a:t>Selected root: 1 &lt; theta &lt; 1.85</a:t>
+              <a:t>Selected root: 1 &lt; theta &lt; alpha_eff</a:t>
             </a:r>
             <a:endParaRPr lang="en-US" sz="1400" dirty="0"/>
           </a:p>
